--- a/bioinformatics_day1_AM.pptx
+++ b/bioinformatics_day1_AM.pptx
@@ -4461,7 +4461,7 @@
               <a:buNone/>
             </a:pPr>
             <a:r>
-              <a:rPr lang="en-US" sz="2000" b="1" dirty="0">
+              <a:rPr lang="zh-TW" altLang="en-US" sz="2000" b="1" dirty="0">
                 <a:solidFill>
                   <a:srgbClr val="21D4FD"/>
                 </a:solidFill>
@@ -4469,7 +4469,7 @@
                 <a:ea typeface="Meiryo UI" panose="020B0604030504040204" pitchFamily="50" charset="-128"/>
                 <a:cs typeface="Noto Sans CJK JP" pitchFamily="34" charset="-120"/>
               </a:rPr>
-              <a:t>Python Notebookに慣れよう</a:t>
+              <a:t>機能解析入門</a:t>
             </a:r>
             <a:endParaRPr lang="en-US" sz="2000" dirty="0">
               <a:latin typeface="Meiryo UI" panose="020B0604030504040204" pitchFamily="50" charset="-128"/>

--- a/bioinformatics_day1_AM.pptx
+++ b/bioinformatics_day1_AM.pptx
@@ -5991,7 +5991,7 @@
         </p:nvSpPr>
         <p:spPr>
           <a:xfrm>
-            <a:off x="4572000" y="3429000"/>
+            <a:off x="4215384" y="3246120"/>
             <a:ext cx="2926080" cy="658368"/>
           </a:xfrm>
           <a:prstGeom prst="rect">
@@ -8073,202 +8073,6 @@
               <a:t>エラーが出ても大丈夫</a:t>
             </a:r>
             <a:endParaRPr lang="en-US" sz="1700" dirty="0">
-              <a:latin typeface="Meiryo UI" panose="020B0604030504040204" pitchFamily="50" charset="-128"/>
-              <a:ea typeface="Meiryo UI" panose="020B0604030504040204" pitchFamily="50" charset="-128"/>
-            </a:endParaRPr>
-          </a:p>
-        </p:txBody>
-      </p:sp>
-      <p:sp>
-        <p:nvSpPr>
-          <p:cNvPr id="16" name="Text 13"/>
-          <p:cNvSpPr/>
-          <p:nvPr/>
-        </p:nvSpPr>
-        <p:spPr>
-          <a:xfrm>
-            <a:off x="7360920" y="1828800"/>
-            <a:ext cx="3383280" cy="256032"/>
-          </a:xfrm>
-          <a:prstGeom prst="rect">
-            <a:avLst/>
-          </a:prstGeom>
-          <a:noFill/>
-          <a:ln/>
-        </p:spPr>
-        <p:txBody>
-          <a:bodyPr wrap="square" lIns="254" tIns="254" rIns="254" bIns="254" rtlCol="0" anchor="t">
-            <a:normAutofit/>
-          </a:bodyPr>
-          <a:lstStyle/>
-          <a:p>
-            <a:pPr marL="0" indent="0" algn="l">
-              <a:buNone/>
-            </a:pPr>
-            <a:r>
-              <a:rPr lang="en-US" sz="1200" b="1" dirty="0">
-                <a:solidFill>
-                  <a:srgbClr val="FFFFFF"/>
-                </a:solidFill>
-                <a:latin typeface="Meiryo UI" panose="020B0604030504040204" pitchFamily="50" charset="-128"/>
-                <a:ea typeface="Meiryo UI" panose="020B0604030504040204" pitchFamily="50" charset="-128"/>
-                <a:cs typeface="Noto Sans CJK JP" pitchFamily="34" charset="-120"/>
-              </a:rPr>
-              <a:t>Markdown cell：説明を読む</a:t>
-            </a:r>
-            <a:endParaRPr lang="en-US" sz="1200" dirty="0">
-              <a:latin typeface="Meiryo UI" panose="020B0604030504040204" pitchFamily="50" charset="-128"/>
-              <a:ea typeface="Meiryo UI" panose="020B0604030504040204" pitchFamily="50" charset="-128"/>
-            </a:endParaRPr>
-          </a:p>
-        </p:txBody>
-      </p:sp>
-      <p:sp>
-        <p:nvSpPr>
-          <p:cNvPr id="17" name="Text 14"/>
-          <p:cNvSpPr/>
-          <p:nvPr/>
-        </p:nvSpPr>
-        <p:spPr>
-          <a:xfrm>
-            <a:off x="7360920" y="2606040"/>
-            <a:ext cx="3383280" cy="219456"/>
-          </a:xfrm>
-          <a:prstGeom prst="rect">
-            <a:avLst/>
-          </a:prstGeom>
-          <a:noFill/>
-          <a:ln/>
-        </p:spPr>
-        <p:txBody>
-          <a:bodyPr wrap="square" lIns="254" tIns="254" rIns="254" bIns="254" rtlCol="0" anchor="t">
-            <a:normAutofit/>
-          </a:bodyPr>
-          <a:lstStyle/>
-          <a:p>
-            <a:pPr marL="0" indent="0" algn="l">
-              <a:buNone/>
-            </a:pPr>
-            <a:r>
-              <a:rPr lang="en-US" sz="1100" b="1" dirty="0">
-                <a:solidFill>
-                  <a:srgbClr val="21D4FD"/>
-                </a:solidFill>
-                <a:latin typeface="Meiryo UI" panose="020B0604030504040204" pitchFamily="50" charset="-128"/>
-                <a:ea typeface="Meiryo UI" panose="020B0604030504040204" pitchFamily="50" charset="-128"/>
-                <a:cs typeface="Noto Sans CJK JP" pitchFamily="34" charset="-120"/>
-              </a:rPr>
-              <a:t>Code cell</a:t>
-            </a:r>
-            <a:endParaRPr lang="en-US" sz="1100" dirty="0">
-              <a:latin typeface="Meiryo UI" panose="020B0604030504040204" pitchFamily="50" charset="-128"/>
-              <a:ea typeface="Meiryo UI" panose="020B0604030504040204" pitchFamily="50" charset="-128"/>
-            </a:endParaRPr>
-          </a:p>
-        </p:txBody>
-      </p:sp>
-      <p:sp>
-        <p:nvSpPr>
-          <p:cNvPr id="18" name="Text 15"/>
-          <p:cNvSpPr/>
-          <p:nvPr/>
-        </p:nvSpPr>
-        <p:spPr>
-          <a:xfrm>
-            <a:off x="7360920" y="2907792"/>
-            <a:ext cx="2834640" cy="457200"/>
-          </a:xfrm>
-          <a:prstGeom prst="rect">
-            <a:avLst/>
-          </a:prstGeom>
-          <a:noFill/>
-          <a:ln/>
-        </p:spPr>
-        <p:txBody>
-          <a:bodyPr wrap="square" lIns="254" tIns="254" rIns="254" bIns="254" rtlCol="0" anchor="t">
-            <a:normAutofit/>
-          </a:bodyPr>
-          <a:lstStyle/>
-          <a:p>
-            <a:pPr marL="0" indent="0" algn="l">
-              <a:buNone/>
-            </a:pPr>
-            <a:r>
-              <a:rPr lang="en-US" sz="1400" dirty="0">
-                <a:solidFill>
-                  <a:srgbClr val="E2F7FF"/>
-                </a:solidFill>
-                <a:latin typeface="Meiryo UI" panose="020B0604030504040204" pitchFamily="50" charset="-128"/>
-                <a:ea typeface="Meiryo UI" panose="020B0604030504040204" pitchFamily="50" charset="-128"/>
-                <a:cs typeface="Noto Sans CJK JP" pitchFamily="34" charset="-120"/>
-              </a:rPr>
-              <a:t>df.head()</a:t>
-            </a:r>
-            <a:endParaRPr lang="en-US" sz="1400" dirty="0">
-              <a:latin typeface="Meiryo UI" panose="020B0604030504040204" pitchFamily="50" charset="-128"/>
-              <a:ea typeface="Meiryo UI" panose="020B0604030504040204" pitchFamily="50" charset="-128"/>
-            </a:endParaRPr>
-          </a:p>
-          <a:p>
-            <a:pPr marL="0" indent="0" algn="l">
-              <a:buNone/>
-            </a:pPr>
-            <a:r>
-              <a:rPr lang="en-US" sz="1400" dirty="0">
-                <a:solidFill>
-                  <a:srgbClr val="E2F7FF"/>
-                </a:solidFill>
-                <a:latin typeface="Meiryo UI" panose="020B0604030504040204" pitchFamily="50" charset="-128"/>
-                <a:ea typeface="Meiryo UI" panose="020B0604030504040204" pitchFamily="50" charset="-128"/>
-                <a:cs typeface="Noto Sans CJK JP" pitchFamily="34" charset="-120"/>
-              </a:rPr>
-              <a:t>plt.show()</a:t>
-            </a:r>
-            <a:endParaRPr lang="en-US" sz="1400" dirty="0">
-              <a:latin typeface="Meiryo UI" panose="020B0604030504040204" pitchFamily="50" charset="-128"/>
-              <a:ea typeface="Meiryo UI" panose="020B0604030504040204" pitchFamily="50" charset="-128"/>
-            </a:endParaRPr>
-          </a:p>
-        </p:txBody>
-      </p:sp>
-      <p:sp>
-        <p:nvSpPr>
-          <p:cNvPr id="19" name="Text 16"/>
-          <p:cNvSpPr/>
-          <p:nvPr/>
-        </p:nvSpPr>
-        <p:spPr>
-          <a:xfrm>
-            <a:off x="7360920" y="3977640"/>
-            <a:ext cx="3566160" cy="292608"/>
-          </a:xfrm>
-          <a:prstGeom prst="rect">
-            <a:avLst/>
-          </a:prstGeom>
-          <a:noFill/>
-          <a:ln/>
-        </p:spPr>
-        <p:txBody>
-          <a:bodyPr wrap="square" lIns="254" tIns="254" rIns="254" bIns="254" rtlCol="0" anchor="t">
-            <a:normAutofit/>
-          </a:bodyPr>
-          <a:lstStyle/>
-          <a:p>
-            <a:pPr marL="0" indent="0" algn="l">
-              <a:buNone/>
-            </a:pPr>
-            <a:r>
-              <a:rPr lang="en-US" sz="1200" dirty="0">
-                <a:solidFill>
-                  <a:srgbClr val="D6E9F6"/>
-                </a:solidFill>
-                <a:latin typeface="Meiryo UI" panose="020B0604030504040204" pitchFamily="50" charset="-128"/>
-                <a:ea typeface="Meiryo UI" panose="020B0604030504040204" pitchFamily="50" charset="-128"/>
-                <a:cs typeface="Noto Sans CJK JP" pitchFamily="34" charset="-120"/>
-              </a:rPr>
-              <a:t>Output：表やグラフが表示される</a:t>
-            </a:r>
-            <a:endParaRPr lang="en-US" sz="1200" dirty="0">
               <a:latin typeface="Meiryo UI" panose="020B0604030504040204" pitchFamily="50" charset="-128"/>
               <a:ea typeface="Meiryo UI" panose="020B0604030504040204" pitchFamily="50" charset="-128"/>
             </a:endParaRPr>
@@ -10020,7 +9824,7 @@
               <a:t>の準備</a:t>
             </a:r>
             <a:r>
-              <a:rPr lang="en-US" altLang="ja-JP" sz="2600" b="1" dirty="0">
+              <a:rPr lang="en-US" altLang="ja-JP" sz="2600" b="1">
                 <a:solidFill>
                   <a:srgbClr val="FFFFFF"/>
                 </a:solidFill>
@@ -10028,7 +9832,7 @@
                 <a:ea typeface="Meiryo UI" panose="020B0604030504040204" pitchFamily="50" charset="-128"/>
                 <a:cs typeface="Noto Sans CJK JP" pitchFamily="34" charset="-120"/>
               </a:rPr>
-              <a:t>2</a:t>
+              <a:t>1</a:t>
             </a:r>
             <a:endParaRPr lang="en-US" sz="2600" dirty="0">
               <a:latin typeface="Meiryo UI" panose="020B0604030504040204" pitchFamily="50" charset="-128"/>

--- a/bioinformatics_day1_AM.pptx
+++ b/bioinformatics_day1_AM.pptx
@@ -5,7 +5,7 @@
     <p:sldMasterId id="2147483648" r:id="rId1"/>
   </p:sldMasterIdLst>
   <p:notesMasterIdLst>
-    <p:notesMasterId r:id="rId16"/>
+    <p:notesMasterId r:id="rId17"/>
   </p:notesMasterIdLst>
   <p:sldIdLst>
     <p:sldId id="256" r:id="rId2"/>
@@ -16,12 +16,13 @@
     <p:sldId id="261" r:id="rId7"/>
     <p:sldId id="262" r:id="rId8"/>
     <p:sldId id="276" r:id="rId9"/>
-    <p:sldId id="271" r:id="rId10"/>
-    <p:sldId id="270" r:id="rId11"/>
-    <p:sldId id="272" r:id="rId12"/>
-    <p:sldId id="273" r:id="rId13"/>
-    <p:sldId id="274" r:id="rId14"/>
-    <p:sldId id="268" r:id="rId15"/>
+    <p:sldId id="277" r:id="rId10"/>
+    <p:sldId id="271" r:id="rId11"/>
+    <p:sldId id="270" r:id="rId12"/>
+    <p:sldId id="272" r:id="rId13"/>
+    <p:sldId id="273" r:id="rId14"/>
+    <p:sldId id="274" r:id="rId15"/>
+    <p:sldId id="268" r:id="rId16"/>
   </p:sldIdLst>
   <p:sldSz cx="12192000" cy="6858000"/>
   <p:notesSz cx="6858000" cy="12192000"/>
@@ -352,6 +353,121 @@
         <p:cNvPr id="1" name="">
           <a:extLst>
             <a:ext uri="{FF2B5EF4-FFF2-40B4-BE49-F238E27FC236}">
+              <a16:creationId xmlns:a16="http://schemas.microsoft.com/office/drawing/2014/main" id="{4FF3E68A-0967-5F4F-0521-C5F12F9061D2}"/>
+            </a:ext>
+          </a:extLst>
+        </p:cNvPr>
+        <p:cNvGrpSpPr/>
+        <p:nvPr/>
+      </p:nvGrpSpPr>
+      <p:grpSpPr>
+        <a:xfrm>
+          <a:off x="0" y="0"/>
+          <a:ext cx="0" cy="0"/>
+          <a:chOff x="0" y="0"/>
+          <a:chExt cx="0" cy="0"/>
+        </a:xfrm>
+      </p:grpSpPr>
+      <p:sp>
+        <p:nvSpPr>
+          <p:cNvPr id="2" name="Slide Image Placeholder 1">
+            <a:extLst>
+              <a:ext uri="{FF2B5EF4-FFF2-40B4-BE49-F238E27FC236}">
+                <a16:creationId xmlns:a16="http://schemas.microsoft.com/office/drawing/2014/main" id="{5C2147D3-7E47-EB28-A132-D25AE9EDEE74}"/>
+              </a:ext>
+            </a:extLst>
+          </p:cNvPr>
+          <p:cNvSpPr>
+            <a:spLocks noGrp="1" noRot="1" noChangeAspect="1"/>
+          </p:cNvSpPr>
+          <p:nvPr>
+            <p:ph type="sldImg"/>
+          </p:nvPr>
+        </p:nvSpPr>
+        <p:spPr/>
+        <p:txBody>
+          <a:bodyPr/>
+          <a:lstStyle/>
+          <a:p>
+            <a:endParaRPr lang="ja-JP" altLang="en-US"/>
+          </a:p>
+        </p:txBody>
+      </p:sp>
+      <p:sp>
+        <p:nvSpPr>
+          <p:cNvPr id="3" name="Notes Placeholder 2">
+            <a:extLst>
+              <a:ext uri="{FF2B5EF4-FFF2-40B4-BE49-F238E27FC236}">
+                <a16:creationId xmlns:a16="http://schemas.microsoft.com/office/drawing/2014/main" id="{44D00ED9-B4C0-66E1-9BF6-833211029152}"/>
+              </a:ext>
+            </a:extLst>
+          </p:cNvPr>
+          <p:cNvSpPr>
+            <a:spLocks noGrp="1"/>
+          </p:cNvSpPr>
+          <p:nvPr>
+            <p:ph type="body" idx="1"/>
+          </p:nvPr>
+        </p:nvSpPr>
+        <p:spPr/>
+        <p:txBody>
+          <a:bodyPr/>
+          <a:lstStyle/>
+          <a:p>
+            <a:endParaRPr lang="en-US" dirty="0"/>
+          </a:p>
+        </p:txBody>
+      </p:sp>
+      <p:sp>
+        <p:nvSpPr>
+          <p:cNvPr id="4" name="Slide Number Placeholder 3">
+            <a:extLst>
+              <a:ext uri="{FF2B5EF4-FFF2-40B4-BE49-F238E27FC236}">
+                <a16:creationId xmlns:a16="http://schemas.microsoft.com/office/drawing/2014/main" id="{24462199-41AC-8D8B-E968-F10953FFE211}"/>
+              </a:ext>
+            </a:extLst>
+          </p:cNvPr>
+          <p:cNvSpPr>
+            <a:spLocks noGrp="1"/>
+          </p:cNvSpPr>
+          <p:nvPr>
+            <p:ph type="sldNum" sz="quarter" idx="10"/>
+          </p:nvPr>
+        </p:nvSpPr>
+        <p:spPr/>
+        <p:txBody>
+          <a:bodyPr/>
+          <a:lstStyle/>
+          <a:p>
+            <a:fld id="{F7021451-1387-4CA6-816F-3879F97B5CBC}" type="slidenum">
+              <a:rPr lang="en-US"/>
+              <a:t>10</a:t>
+            </a:fld>
+            <a:endParaRPr lang="en-US"/>
+          </a:p>
+        </p:txBody>
+      </p:sp>
+    </p:spTree>
+    <p:extLst>
+      <p:ext uri="{BB962C8B-B14F-4D97-AF65-F5344CB8AC3E}">
+        <p14:creationId xmlns:p14="http://schemas.microsoft.com/office/powerpoint/2010/main" val="1698694021"/>
+      </p:ext>
+    </p:extLst>
+  </p:cSld>
+  <p:clrMapOvr>
+    <a:masterClrMapping/>
+  </p:clrMapOvr>
+</p:notes>
+</file>
+
+<file path=ppt/notesSlides/notesSlide11.xml><?xml version="1.0" encoding="utf-8"?>
+<p:notes xmlns:a="http://schemas.openxmlformats.org/drawingml/2006/main" xmlns:r="http://schemas.openxmlformats.org/officeDocument/2006/relationships" xmlns:p="http://schemas.openxmlformats.org/presentationml/2006/main">
+  <p:cSld>
+    <p:spTree>
+      <p:nvGrpSpPr>
+        <p:cNvPr id="1" name="">
+          <a:extLst>
+            <a:ext uri="{FF2B5EF4-FFF2-40B4-BE49-F238E27FC236}">
               <a16:creationId xmlns:a16="http://schemas.microsoft.com/office/drawing/2014/main" id="{0F136352-BAAB-1079-6DDE-3AEDC65F8B80}"/>
             </a:ext>
           </a:extLst>
@@ -440,7 +556,7 @@
           <a:p>
             <a:fld id="{F7021451-1387-4CA6-816F-3879F97B5CBC}" type="slidenum">
               <a:rPr lang="en-US"/>
-              <a:t>10</a:t>
+              <a:t>11</a:t>
             </a:fld>
             <a:endParaRPr lang="en-US"/>
           </a:p>
@@ -459,7 +575,7 @@
 </p:notes>
 </file>
 
-<file path=ppt/notesSlides/notesSlide11.xml><?xml version="1.0" encoding="utf-8"?>
+<file path=ppt/notesSlides/notesSlide12.xml><?xml version="1.0" encoding="utf-8"?>
 <p:notes xmlns:a="http://schemas.openxmlformats.org/drawingml/2006/main" xmlns:r="http://schemas.openxmlformats.org/officeDocument/2006/relationships" xmlns:p="http://schemas.openxmlformats.org/presentationml/2006/main">
   <p:cSld>
     <p:spTree>
@@ -555,7 +671,7 @@
           <a:p>
             <a:fld id="{F7021451-1387-4CA6-816F-3879F97B5CBC}" type="slidenum">
               <a:rPr lang="en-US"/>
-              <a:t>11</a:t>
+              <a:t>12</a:t>
             </a:fld>
             <a:endParaRPr lang="en-US"/>
           </a:p>
@@ -574,7 +690,7 @@
 </p:notes>
 </file>
 
-<file path=ppt/notesSlides/notesSlide12.xml><?xml version="1.0" encoding="utf-8"?>
+<file path=ppt/notesSlides/notesSlide13.xml><?xml version="1.0" encoding="utf-8"?>
 <p:notes xmlns:a="http://schemas.openxmlformats.org/drawingml/2006/main" xmlns:r="http://schemas.openxmlformats.org/officeDocument/2006/relationships" xmlns:p="http://schemas.openxmlformats.org/presentationml/2006/main">
   <p:cSld>
     <p:spTree>
@@ -670,7 +786,7 @@
           <a:p>
             <a:fld id="{F7021451-1387-4CA6-816F-3879F97B5CBC}" type="slidenum">
               <a:rPr lang="en-US"/>
-              <a:t>12</a:t>
+              <a:t>13</a:t>
             </a:fld>
             <a:endParaRPr lang="en-US"/>
           </a:p>
@@ -689,7 +805,7 @@
 </p:notes>
 </file>
 
-<file path=ppt/notesSlides/notesSlide13.xml><?xml version="1.0" encoding="utf-8"?>
+<file path=ppt/notesSlides/notesSlide14.xml><?xml version="1.0" encoding="utf-8"?>
 <p:notes xmlns:a="http://schemas.openxmlformats.org/drawingml/2006/main" xmlns:r="http://schemas.openxmlformats.org/officeDocument/2006/relationships" xmlns:p="http://schemas.openxmlformats.org/presentationml/2006/main">
   <p:cSld>
     <p:spTree>
@@ -785,7 +901,7 @@
           <a:p>
             <a:fld id="{F7021451-1387-4CA6-816F-3879F97B5CBC}" type="slidenum">
               <a:rPr lang="en-US"/>
-              <a:t>13</a:t>
+              <a:t>14</a:t>
             </a:fld>
             <a:endParaRPr lang="en-US"/>
           </a:p>
@@ -804,7 +920,7 @@
 </p:notes>
 </file>
 
-<file path=ppt/notesSlides/notesSlide14.xml><?xml version="1.0" encoding="utf-8"?>
+<file path=ppt/notesSlides/notesSlide15.xml><?xml version="1.0" encoding="utf-8"?>
 <p:notes xmlns:a="http://schemas.openxmlformats.org/drawingml/2006/main" xmlns:r="http://schemas.openxmlformats.org/officeDocument/2006/relationships" xmlns:p="http://schemas.openxmlformats.org/presentationml/2006/main">
   <p:cSld>
     <p:spTree>
@@ -876,7 +992,7 @@
           <a:p>
             <a:fld id="{F7021451-1387-4CA6-816F-3879F97B5CBC}" type="slidenum">
               <a:rPr lang="en-US"/>
-              <a:t>14</a:t>
+              <a:t>15</a:t>
             </a:fld>
             <a:endParaRPr lang="en-US"/>
           </a:p>
@@ -1564,7 +1680,7 @@
         <p:cNvPr id="1" name="">
           <a:extLst>
             <a:ext uri="{FF2B5EF4-FFF2-40B4-BE49-F238E27FC236}">
-              <a16:creationId xmlns:a16="http://schemas.microsoft.com/office/drawing/2014/main" id="{4FF3E68A-0967-5F4F-0521-C5F12F9061D2}"/>
+              <a16:creationId xmlns:a16="http://schemas.microsoft.com/office/drawing/2014/main" id="{2CF42837-FD69-792E-4344-26A11FBEBD99}"/>
             </a:ext>
           </a:extLst>
         </p:cNvPr>
@@ -1584,7 +1700,7 @@
           <p:cNvPr id="2" name="Slide Image Placeholder 1">
             <a:extLst>
               <a:ext uri="{FF2B5EF4-FFF2-40B4-BE49-F238E27FC236}">
-                <a16:creationId xmlns:a16="http://schemas.microsoft.com/office/drawing/2014/main" id="{5C2147D3-7E47-EB28-A132-D25AE9EDEE74}"/>
+                <a16:creationId xmlns:a16="http://schemas.microsoft.com/office/drawing/2014/main" id="{92CB63C7-E304-28BC-7B99-AB0BE30370DE}"/>
               </a:ext>
             </a:extLst>
           </p:cNvPr>
@@ -1609,7 +1725,7 @@
           <p:cNvPr id="3" name="Notes Placeholder 2">
             <a:extLst>
               <a:ext uri="{FF2B5EF4-FFF2-40B4-BE49-F238E27FC236}">
-                <a16:creationId xmlns:a16="http://schemas.microsoft.com/office/drawing/2014/main" id="{44D00ED9-B4C0-66E1-9BF6-833211029152}"/>
+                <a16:creationId xmlns:a16="http://schemas.microsoft.com/office/drawing/2014/main" id="{6D7336AF-FD58-AAEF-D719-6C526CCE8111}"/>
               </a:ext>
             </a:extLst>
           </p:cNvPr>
@@ -1634,7 +1750,7 @@
           <p:cNvPr id="4" name="Slide Number Placeholder 3">
             <a:extLst>
               <a:ext uri="{FF2B5EF4-FFF2-40B4-BE49-F238E27FC236}">
-                <a16:creationId xmlns:a16="http://schemas.microsoft.com/office/drawing/2014/main" id="{24462199-41AC-8D8B-E968-F10953FFE211}"/>
+                <a16:creationId xmlns:a16="http://schemas.microsoft.com/office/drawing/2014/main" id="{B09F06C7-87C6-5009-3CE4-634BED72588D}"/>
               </a:ext>
             </a:extLst>
           </p:cNvPr>
@@ -1661,7 +1777,7 @@
     </p:spTree>
     <p:extLst>
       <p:ext uri="{BB962C8B-B14F-4D97-AF65-F5344CB8AC3E}">
-        <p14:creationId xmlns:p14="http://schemas.microsoft.com/office/powerpoint/2010/main" val="1698694021"/>
+        <p14:creationId xmlns:p14="http://schemas.microsoft.com/office/powerpoint/2010/main" val="1978090550"/>
       </p:ext>
     </p:extLst>
   </p:cSld>
@@ -2302,6 +2418,685 @@
         <p:cNvPr id="1" name="">
           <a:extLst>
             <a:ext uri="{FF2B5EF4-FFF2-40B4-BE49-F238E27FC236}">
+              <a16:creationId xmlns:a16="http://schemas.microsoft.com/office/drawing/2014/main" id="{3B050573-66FF-F9AB-0765-04A31889055D}"/>
+            </a:ext>
+          </a:extLst>
+        </p:cNvPr>
+        <p:cNvGrpSpPr/>
+        <p:nvPr/>
+      </p:nvGrpSpPr>
+      <p:grpSpPr>
+        <a:xfrm>
+          <a:off x="0" y="0"/>
+          <a:ext cx="0" cy="0"/>
+          <a:chOff x="0" y="0"/>
+          <a:chExt cx="0" cy="0"/>
+        </a:xfrm>
+      </p:grpSpPr>
+      <p:sp>
+        <p:nvSpPr>
+          <p:cNvPr id="3" name="Text 0">
+            <a:extLst>
+              <a:ext uri="{FF2B5EF4-FFF2-40B4-BE49-F238E27FC236}">
+                <a16:creationId xmlns:a16="http://schemas.microsoft.com/office/drawing/2014/main" id="{B4FD52C4-C397-2514-E49E-B1BF8EE8FE07}"/>
+              </a:ext>
+            </a:extLst>
+          </p:cNvPr>
+          <p:cNvSpPr/>
+          <p:nvPr/>
+        </p:nvSpPr>
+        <p:spPr>
+          <a:xfrm>
+            <a:off x="502920" y="347472"/>
+            <a:ext cx="1828800" cy="201168"/>
+          </a:xfrm>
+          <a:prstGeom prst="rect">
+            <a:avLst/>
+          </a:prstGeom>
+          <a:noFill/>
+          <a:ln/>
+        </p:spPr>
+        <p:txBody>
+          <a:bodyPr wrap="square" lIns="254" tIns="254" rIns="254" bIns="254" rtlCol="0" anchor="t">
+            <a:normAutofit/>
+          </a:bodyPr>
+          <a:lstStyle/>
+          <a:p>
+            <a:pPr marL="0" indent="0" algn="l">
+              <a:buNone/>
+            </a:pPr>
+            <a:r>
+              <a:rPr lang="en-US" sz="950" b="1" dirty="0">
+                <a:solidFill>
+                  <a:srgbClr val="21D4FD"/>
+                </a:solidFill>
+                <a:latin typeface="Meiryo UI" panose="020B0604030504040204" pitchFamily="50" charset="-128"/>
+                <a:ea typeface="Meiryo UI" panose="020B0604030504040204" pitchFamily="50" charset="-128"/>
+                <a:cs typeface="Noto Sans CJK JP" pitchFamily="34" charset="-120"/>
+              </a:rPr>
+              <a:t>Day 1 Intro</a:t>
+            </a:r>
+            <a:endParaRPr lang="en-US" sz="950" dirty="0">
+              <a:latin typeface="Meiryo UI" panose="020B0604030504040204" pitchFamily="50" charset="-128"/>
+              <a:ea typeface="Meiryo UI" panose="020B0604030504040204" pitchFamily="50" charset="-128"/>
+            </a:endParaRPr>
+          </a:p>
+        </p:txBody>
+      </p:sp>
+      <p:sp>
+        <p:nvSpPr>
+          <p:cNvPr id="4" name="Text 1">
+            <a:extLst>
+              <a:ext uri="{FF2B5EF4-FFF2-40B4-BE49-F238E27FC236}">
+                <a16:creationId xmlns:a16="http://schemas.microsoft.com/office/drawing/2014/main" id="{78D25E46-3B8A-00A4-F470-6E273AB428B8}"/>
+              </a:ext>
+            </a:extLst>
+          </p:cNvPr>
+          <p:cNvSpPr/>
+          <p:nvPr/>
+        </p:nvSpPr>
+        <p:spPr>
+          <a:xfrm>
+            <a:off x="502920" y="804672"/>
+            <a:ext cx="7863840" cy="502920"/>
+          </a:xfrm>
+          <a:prstGeom prst="rect">
+            <a:avLst/>
+          </a:prstGeom>
+          <a:noFill/>
+          <a:ln/>
+        </p:spPr>
+        <p:txBody>
+          <a:bodyPr wrap="square" lIns="254" tIns="254" rIns="254" bIns="254" rtlCol="0" anchor="t">
+            <a:normAutofit/>
+          </a:bodyPr>
+          <a:lstStyle/>
+          <a:p>
+            <a:pPr marL="0" indent="0" algn="l">
+              <a:buNone/>
+            </a:pPr>
+            <a:r>
+              <a:rPr lang="en-US" sz="2600" b="1" dirty="0">
+                <a:solidFill>
+                  <a:srgbClr val="FFFFFF"/>
+                </a:solidFill>
+                <a:latin typeface="Meiryo UI" panose="020B0604030504040204" pitchFamily="50" charset="-128"/>
+                <a:ea typeface="Meiryo UI" panose="020B0604030504040204" pitchFamily="50" charset="-128"/>
+                <a:cs typeface="Noto Sans CJK JP" pitchFamily="34" charset="-120"/>
+              </a:rPr>
+              <a:t>Google Colab </a:t>
+            </a:r>
+            <a:r>
+              <a:rPr lang="ja-JP" altLang="en-US" sz="2600" b="1" dirty="0">
+                <a:solidFill>
+                  <a:srgbClr val="FFFFFF"/>
+                </a:solidFill>
+                <a:latin typeface="Meiryo UI" panose="020B0604030504040204" pitchFamily="50" charset="-128"/>
+                <a:ea typeface="Meiryo UI" panose="020B0604030504040204" pitchFamily="50" charset="-128"/>
+                <a:cs typeface="Noto Sans CJK JP" pitchFamily="34" charset="-120"/>
+              </a:rPr>
+              <a:t>の準備</a:t>
+            </a:r>
+            <a:r>
+              <a:rPr lang="en-US" altLang="ja-JP" sz="2600" b="1" dirty="0">
+                <a:solidFill>
+                  <a:srgbClr val="FFFFFF"/>
+                </a:solidFill>
+                <a:latin typeface="Meiryo UI" panose="020B0604030504040204" pitchFamily="50" charset="-128"/>
+                <a:ea typeface="Meiryo UI" panose="020B0604030504040204" pitchFamily="50" charset="-128"/>
+                <a:cs typeface="Noto Sans CJK JP" pitchFamily="34" charset="-120"/>
+              </a:rPr>
+              <a:t>1</a:t>
+            </a:r>
+            <a:endParaRPr lang="en-US" sz="2600" dirty="0">
+              <a:latin typeface="Meiryo UI" panose="020B0604030504040204" pitchFamily="50" charset="-128"/>
+              <a:ea typeface="Meiryo UI" panose="020B0604030504040204" pitchFamily="50" charset="-128"/>
+            </a:endParaRPr>
+          </a:p>
+        </p:txBody>
+      </p:sp>
+      <p:sp>
+        <p:nvSpPr>
+          <p:cNvPr id="5" name="Text 2">
+            <a:extLst>
+              <a:ext uri="{FF2B5EF4-FFF2-40B4-BE49-F238E27FC236}">
+                <a16:creationId xmlns:a16="http://schemas.microsoft.com/office/drawing/2014/main" id="{D0B0E000-BE82-6869-02E7-1014709E90E7}"/>
+              </a:ext>
+            </a:extLst>
+          </p:cNvPr>
+          <p:cNvSpPr/>
+          <p:nvPr/>
+        </p:nvSpPr>
+        <p:spPr>
+          <a:xfrm>
+            <a:off x="1280160" y="1593667"/>
+            <a:ext cx="365760" cy="274320"/>
+          </a:xfrm>
+          <a:prstGeom prst="rect">
+            <a:avLst/>
+          </a:prstGeom>
+          <a:noFill/>
+          <a:ln/>
+        </p:spPr>
+        <p:txBody>
+          <a:bodyPr wrap="square" lIns="254" tIns="254" rIns="254" bIns="254" rtlCol="0" anchor="t">
+            <a:normAutofit lnSpcReduction="10000"/>
+          </a:bodyPr>
+          <a:lstStyle/>
+          <a:p>
+            <a:pPr marL="0" indent="0" algn="ctr">
+              <a:buNone/>
+            </a:pPr>
+            <a:r>
+              <a:rPr lang="en-US" sz="1800" b="1" dirty="0">
+                <a:solidFill>
+                  <a:srgbClr val="16E0C5"/>
+                </a:solidFill>
+                <a:latin typeface="Meiryo UI" panose="020B0604030504040204" pitchFamily="50" charset="-128"/>
+                <a:ea typeface="Meiryo UI" panose="020B0604030504040204" pitchFamily="50" charset="-128"/>
+                <a:cs typeface="Noto Sans CJK JP" pitchFamily="34" charset="-120"/>
+              </a:rPr>
+              <a:t>✓</a:t>
+            </a:r>
+            <a:endParaRPr lang="en-US" sz="1800" dirty="0">
+              <a:latin typeface="Meiryo UI" panose="020B0604030504040204" pitchFamily="50" charset="-128"/>
+              <a:ea typeface="Meiryo UI" panose="020B0604030504040204" pitchFamily="50" charset="-128"/>
+            </a:endParaRPr>
+          </a:p>
+        </p:txBody>
+      </p:sp>
+      <p:sp>
+        <p:nvSpPr>
+          <p:cNvPr id="6" name="Text 3">
+            <a:extLst>
+              <a:ext uri="{FF2B5EF4-FFF2-40B4-BE49-F238E27FC236}">
+                <a16:creationId xmlns:a16="http://schemas.microsoft.com/office/drawing/2014/main" id="{4B6A4C37-CC5E-F148-3A7C-050F104C7BA7}"/>
+              </a:ext>
+            </a:extLst>
+          </p:cNvPr>
+          <p:cNvSpPr/>
+          <p:nvPr/>
+        </p:nvSpPr>
+        <p:spPr>
+          <a:xfrm>
+            <a:off x="1828800" y="1593667"/>
+            <a:ext cx="8686800" cy="384048"/>
+          </a:xfrm>
+          <a:prstGeom prst="rect">
+            <a:avLst/>
+          </a:prstGeom>
+          <a:noFill/>
+          <a:ln/>
+        </p:spPr>
+        <p:txBody>
+          <a:bodyPr wrap="square" lIns="254" tIns="254" rIns="254" bIns="254" rtlCol="0" anchor="t">
+            <a:normAutofit/>
+          </a:bodyPr>
+          <a:lstStyle/>
+          <a:p>
+            <a:pPr marL="0" indent="0" algn="l">
+              <a:buNone/>
+            </a:pPr>
+            <a:r>
+              <a:rPr lang="ja-JP" altLang="en-US" sz="1900" b="1" dirty="0">
+                <a:solidFill>
+                  <a:srgbClr val="FFFFFF"/>
+                </a:solidFill>
+                <a:latin typeface="Meiryo UI" panose="020B0604030504040204" pitchFamily="50" charset="-128"/>
+                <a:ea typeface="Meiryo UI" panose="020B0604030504040204" pitchFamily="50" charset="-128"/>
+                <a:cs typeface="Noto Sans CJK JP" pitchFamily="34" charset="-120"/>
+              </a:rPr>
+              <a:t>鳥大</a:t>
+            </a:r>
+            <a:r>
+              <a:rPr lang="en-US" altLang="ja-JP" sz="1900" b="1" dirty="0">
+                <a:solidFill>
+                  <a:srgbClr val="FFFFFF"/>
+                </a:solidFill>
+                <a:latin typeface="Meiryo UI" panose="020B0604030504040204" pitchFamily="50" charset="-128"/>
+                <a:ea typeface="Meiryo UI" panose="020B0604030504040204" pitchFamily="50" charset="-128"/>
+                <a:cs typeface="Noto Sans CJK JP" pitchFamily="34" charset="-120"/>
+              </a:rPr>
+              <a:t>ID</a:t>
+            </a:r>
+            <a:r>
+              <a:rPr lang="ja-JP" altLang="en-US" sz="1900" b="1" dirty="0">
+                <a:solidFill>
+                  <a:srgbClr val="FFFFFF"/>
+                </a:solidFill>
+                <a:latin typeface="Meiryo UI" panose="020B0604030504040204" pitchFamily="50" charset="-128"/>
+                <a:ea typeface="Meiryo UI" panose="020B0604030504040204" pitchFamily="50" charset="-128"/>
+                <a:cs typeface="Noto Sans CJK JP" pitchFamily="34" charset="-120"/>
+              </a:rPr>
+              <a:t>（学籍番号で）ログイン</a:t>
+            </a:r>
+          </a:p>
+        </p:txBody>
+      </p:sp>
+      <p:sp>
+        <p:nvSpPr>
+          <p:cNvPr id="7" name="Text 4">
+            <a:extLst>
+              <a:ext uri="{FF2B5EF4-FFF2-40B4-BE49-F238E27FC236}">
+                <a16:creationId xmlns:a16="http://schemas.microsoft.com/office/drawing/2014/main" id="{F61BC422-AFD4-1DDA-FEAA-2EA0FA408FA7}"/>
+              </a:ext>
+            </a:extLst>
+          </p:cNvPr>
+          <p:cNvSpPr/>
+          <p:nvPr/>
+        </p:nvSpPr>
+        <p:spPr>
+          <a:xfrm>
+            <a:off x="1280160" y="1980326"/>
+            <a:ext cx="365760" cy="274320"/>
+          </a:xfrm>
+          <a:prstGeom prst="rect">
+            <a:avLst/>
+          </a:prstGeom>
+          <a:noFill/>
+          <a:ln/>
+        </p:spPr>
+        <p:txBody>
+          <a:bodyPr wrap="square" lIns="254" tIns="254" rIns="254" bIns="254" rtlCol="0" anchor="t">
+            <a:normAutofit lnSpcReduction="10000"/>
+          </a:bodyPr>
+          <a:lstStyle/>
+          <a:p>
+            <a:pPr marL="0" indent="0" algn="ctr">
+              <a:buNone/>
+            </a:pPr>
+            <a:r>
+              <a:rPr lang="en-US" sz="1800" b="1" dirty="0">
+                <a:solidFill>
+                  <a:srgbClr val="16E0C5"/>
+                </a:solidFill>
+                <a:latin typeface="Meiryo UI" panose="020B0604030504040204" pitchFamily="50" charset="-128"/>
+                <a:ea typeface="Meiryo UI" panose="020B0604030504040204" pitchFamily="50" charset="-128"/>
+                <a:cs typeface="Noto Sans CJK JP" pitchFamily="34" charset="-120"/>
+              </a:rPr>
+              <a:t>✓</a:t>
+            </a:r>
+            <a:endParaRPr lang="en-US" sz="1800" dirty="0">
+              <a:latin typeface="Meiryo UI" panose="020B0604030504040204" pitchFamily="50" charset="-128"/>
+              <a:ea typeface="Meiryo UI" panose="020B0604030504040204" pitchFamily="50" charset="-128"/>
+            </a:endParaRPr>
+          </a:p>
+        </p:txBody>
+      </p:sp>
+      <p:sp>
+        <p:nvSpPr>
+          <p:cNvPr id="8" name="Text 5">
+            <a:extLst>
+              <a:ext uri="{FF2B5EF4-FFF2-40B4-BE49-F238E27FC236}">
+                <a16:creationId xmlns:a16="http://schemas.microsoft.com/office/drawing/2014/main" id="{9B2BC43F-62C9-595B-90F9-A72EE1E8E13D}"/>
+              </a:ext>
+            </a:extLst>
+          </p:cNvPr>
+          <p:cNvSpPr/>
+          <p:nvPr/>
+        </p:nvSpPr>
+        <p:spPr>
+          <a:xfrm>
+            <a:off x="1828800" y="1980326"/>
+            <a:ext cx="8686800" cy="384048"/>
+          </a:xfrm>
+          <a:prstGeom prst="rect">
+            <a:avLst/>
+          </a:prstGeom>
+          <a:noFill/>
+          <a:ln/>
+        </p:spPr>
+        <p:txBody>
+          <a:bodyPr wrap="square" lIns="254" tIns="254" rIns="254" bIns="254" rtlCol="0" anchor="t">
+            <a:normAutofit/>
+          </a:bodyPr>
+          <a:lstStyle/>
+          <a:p>
+            <a:pPr marL="0" indent="0" algn="l">
+              <a:buNone/>
+            </a:pPr>
+            <a:r>
+              <a:rPr lang="en-US" sz="1900" b="1" dirty="0">
+                <a:solidFill>
+                  <a:srgbClr val="FFFFFF"/>
+                </a:solidFill>
+                <a:latin typeface="Meiryo UI" panose="020B0604030504040204" pitchFamily="50" charset="-128"/>
+                <a:ea typeface="Meiryo UI" panose="020B0604030504040204" pitchFamily="50" charset="-128"/>
+                <a:cs typeface="Noto Sans CJK JP" pitchFamily="34" charset="-120"/>
+              </a:rPr>
+              <a:t>Google colab（colaboratory）</a:t>
+            </a:r>
+            <a:r>
+              <a:rPr lang="ja-JP" altLang="en-US" sz="1900" b="1" dirty="0">
+                <a:solidFill>
+                  <a:srgbClr val="FFFFFF"/>
+                </a:solidFill>
+                <a:latin typeface="Meiryo UI" panose="020B0604030504040204" pitchFamily="50" charset="-128"/>
+                <a:ea typeface="Meiryo UI" panose="020B0604030504040204" pitchFamily="50" charset="-128"/>
+                <a:cs typeface="Noto Sans CJK JP" pitchFamily="34" charset="-120"/>
+              </a:rPr>
+              <a:t>を検索</a:t>
+            </a:r>
+          </a:p>
+        </p:txBody>
+      </p:sp>
+      <p:sp>
+        <p:nvSpPr>
+          <p:cNvPr id="16" name="Text 13">
+            <a:extLst>
+              <a:ext uri="{FF2B5EF4-FFF2-40B4-BE49-F238E27FC236}">
+                <a16:creationId xmlns:a16="http://schemas.microsoft.com/office/drawing/2014/main" id="{CEB18A70-47D4-FC83-1728-30368D3EA916}"/>
+              </a:ext>
+            </a:extLst>
+          </p:cNvPr>
+          <p:cNvSpPr/>
+          <p:nvPr/>
+        </p:nvSpPr>
+        <p:spPr>
+          <a:xfrm>
+            <a:off x="502920" y="6473952"/>
+            <a:ext cx="7315200" cy="182880"/>
+          </a:xfrm>
+          <a:prstGeom prst="rect">
+            <a:avLst/>
+          </a:prstGeom>
+          <a:noFill/>
+          <a:ln/>
+        </p:spPr>
+        <p:txBody>
+          <a:bodyPr wrap="square" lIns="254" tIns="254" rIns="254" bIns="254" rtlCol="0" anchor="t">
+            <a:normAutofit/>
+          </a:bodyPr>
+          <a:lstStyle/>
+          <a:p>
+            <a:pPr marL="0" indent="0" algn="l">
+              <a:buNone/>
+            </a:pPr>
+            <a:r>
+              <a:rPr lang="en-US" sz="850" dirty="0">
+                <a:solidFill>
+                  <a:srgbClr val="A9C1D2"/>
+                </a:solidFill>
+                <a:latin typeface="Meiryo UI" panose="020B0604030504040204" pitchFamily="50" charset="-128"/>
+                <a:ea typeface="Meiryo UI" panose="020B0604030504040204" pitchFamily="50" charset="-128"/>
+                <a:cs typeface="Noto Sans CJK JP" pitchFamily="34" charset="-120"/>
+              </a:rPr>
+              <a:t>バイオ技術 Day 1｜遺伝子発現データを解析する</a:t>
+            </a:r>
+            <a:endParaRPr lang="en-US" sz="850" dirty="0">
+              <a:latin typeface="Meiryo UI" panose="020B0604030504040204" pitchFamily="50" charset="-128"/>
+              <a:ea typeface="Meiryo UI" panose="020B0604030504040204" pitchFamily="50" charset="-128"/>
+            </a:endParaRPr>
+          </a:p>
+        </p:txBody>
+      </p:sp>
+      <p:pic>
+        <p:nvPicPr>
+          <p:cNvPr id="17" name="図 16">
+            <a:extLst>
+              <a:ext uri="{FF2B5EF4-FFF2-40B4-BE49-F238E27FC236}">
+                <a16:creationId xmlns:a16="http://schemas.microsoft.com/office/drawing/2014/main" id="{47453518-29F0-E950-1CF7-FF70A67E74F3}"/>
+              </a:ext>
+            </a:extLst>
+          </p:cNvPr>
+          <p:cNvPicPr>
+            <a:picLocks noChangeAspect="1"/>
+          </p:cNvPicPr>
+          <p:nvPr/>
+        </p:nvPicPr>
+        <p:blipFill>
+          <a:blip r:embed="rId3"/>
+          <a:stretch>
+            <a:fillRect/>
+          </a:stretch>
+        </p:blipFill>
+        <p:spPr>
+          <a:xfrm>
+            <a:off x="1424255" y="2595886"/>
+            <a:ext cx="7429156" cy="3913469"/>
+          </a:xfrm>
+          <a:prstGeom prst="rect">
+            <a:avLst/>
+          </a:prstGeom>
+        </p:spPr>
+      </p:pic>
+      <p:sp>
+        <p:nvSpPr>
+          <p:cNvPr id="19" name="正方形/長方形 18">
+            <a:extLst>
+              <a:ext uri="{FF2B5EF4-FFF2-40B4-BE49-F238E27FC236}">
+                <a16:creationId xmlns:a16="http://schemas.microsoft.com/office/drawing/2014/main" id="{AF61B29D-FCA9-7E76-2110-5BEBD18D8789}"/>
+              </a:ext>
+            </a:extLst>
+          </p:cNvPr>
+          <p:cNvSpPr/>
+          <p:nvPr/>
+        </p:nvSpPr>
+        <p:spPr>
+          <a:xfrm>
+            <a:off x="8254713" y="3059669"/>
+            <a:ext cx="754656" cy="447188"/>
+          </a:xfrm>
+          <a:prstGeom prst="rect">
+            <a:avLst/>
+          </a:prstGeom>
+          <a:noFill/>
+          <a:ln w="38100">
+            <a:solidFill>
+              <a:srgbClr val="FF0000"/>
+            </a:solidFill>
+          </a:ln>
+          <a:effectLst/>
+        </p:spPr>
+        <p:style>
+          <a:lnRef idx="1">
+            <a:schemeClr val="accent1"/>
+          </a:lnRef>
+          <a:fillRef idx="3">
+            <a:schemeClr val="accent1"/>
+          </a:fillRef>
+          <a:effectRef idx="2">
+            <a:schemeClr val="accent1"/>
+          </a:effectRef>
+          <a:fontRef idx="minor">
+            <a:schemeClr val="lt1"/>
+          </a:fontRef>
+        </p:style>
+        <p:txBody>
+          <a:bodyPr rtlCol="0" anchor="ctr"/>
+          <a:lstStyle/>
+          <a:p>
+            <a:pPr algn="ctr"/>
+            <a:endParaRPr kumimoji="1" lang="ja-JP" altLang="en-US"/>
+          </a:p>
+        </p:txBody>
+      </p:sp>
+      <p:sp>
+        <p:nvSpPr>
+          <p:cNvPr id="21" name="矢印: 右 20">
+            <a:extLst>
+              <a:ext uri="{FF2B5EF4-FFF2-40B4-BE49-F238E27FC236}">
+                <a16:creationId xmlns:a16="http://schemas.microsoft.com/office/drawing/2014/main" id="{7862F98D-7637-A485-5726-8E8BF7EBBB4F}"/>
+              </a:ext>
+            </a:extLst>
+          </p:cNvPr>
+          <p:cNvSpPr/>
+          <p:nvPr/>
+        </p:nvSpPr>
+        <p:spPr>
+          <a:xfrm rot="10800000">
+            <a:off x="9187475" y="3059669"/>
+            <a:ext cx="635249" cy="447188"/>
+          </a:xfrm>
+          <a:prstGeom prst="rightArrow">
+            <a:avLst/>
+          </a:prstGeom>
+          <a:solidFill>
+            <a:srgbClr val="FF0000"/>
+          </a:solidFill>
+          <a:ln>
+            <a:solidFill>
+              <a:srgbClr val="FF0000"/>
+            </a:solidFill>
+          </a:ln>
+          <a:effectLst/>
+        </p:spPr>
+        <p:style>
+          <a:lnRef idx="1">
+            <a:schemeClr val="accent1"/>
+          </a:lnRef>
+          <a:fillRef idx="3">
+            <a:schemeClr val="accent1"/>
+          </a:fillRef>
+          <a:effectRef idx="2">
+            <a:schemeClr val="accent1"/>
+          </a:effectRef>
+          <a:fontRef idx="minor">
+            <a:schemeClr val="lt1"/>
+          </a:fontRef>
+        </p:style>
+        <p:txBody>
+          <a:bodyPr rtlCol="0" anchor="ctr"/>
+          <a:lstStyle/>
+          <a:p>
+            <a:pPr algn="ctr"/>
+            <a:endParaRPr kumimoji="1" lang="ja-JP" altLang="en-US"/>
+          </a:p>
+        </p:txBody>
+      </p:sp>
+      <p:sp>
+        <p:nvSpPr>
+          <p:cNvPr id="23" name="正方形/長方形 22">
+            <a:extLst>
+              <a:ext uri="{FF2B5EF4-FFF2-40B4-BE49-F238E27FC236}">
+                <a16:creationId xmlns:a16="http://schemas.microsoft.com/office/drawing/2014/main" id="{B6E124D3-E20A-F2FD-8C20-8E880F3E36B1}"/>
+              </a:ext>
+            </a:extLst>
+          </p:cNvPr>
+          <p:cNvSpPr/>
+          <p:nvPr/>
+        </p:nvSpPr>
+        <p:spPr>
+          <a:xfrm>
+            <a:off x="3449521" y="5190466"/>
+            <a:ext cx="1070473" cy="511539"/>
+          </a:xfrm>
+          <a:prstGeom prst="rect">
+            <a:avLst/>
+          </a:prstGeom>
+          <a:noFill/>
+          <a:ln w="38100">
+            <a:solidFill>
+              <a:srgbClr val="FF0000"/>
+            </a:solidFill>
+          </a:ln>
+          <a:effectLst/>
+        </p:spPr>
+        <p:style>
+          <a:lnRef idx="1">
+            <a:schemeClr val="accent1"/>
+          </a:lnRef>
+          <a:fillRef idx="3">
+            <a:schemeClr val="accent1"/>
+          </a:fillRef>
+          <a:effectRef idx="2">
+            <a:schemeClr val="accent1"/>
+          </a:effectRef>
+          <a:fontRef idx="minor">
+            <a:schemeClr val="lt1"/>
+          </a:fontRef>
+        </p:style>
+        <p:txBody>
+          <a:bodyPr rtlCol="0" anchor="ctr"/>
+          <a:lstStyle/>
+          <a:p>
+            <a:pPr algn="ctr"/>
+            <a:endParaRPr kumimoji="1" lang="ja-JP" altLang="en-US"/>
+          </a:p>
+        </p:txBody>
+      </p:sp>
+      <p:sp>
+        <p:nvSpPr>
+          <p:cNvPr id="25" name="テキスト ボックス 24">
+            <a:extLst>
+              <a:ext uri="{FF2B5EF4-FFF2-40B4-BE49-F238E27FC236}">
+                <a16:creationId xmlns:a16="http://schemas.microsoft.com/office/drawing/2014/main" id="{84B37DA9-F069-DB3E-422D-7C86D90F4927}"/>
+              </a:ext>
+            </a:extLst>
+          </p:cNvPr>
+          <p:cNvSpPr txBox="1"/>
+          <p:nvPr/>
+        </p:nvSpPr>
+        <p:spPr>
+          <a:xfrm>
+            <a:off x="10033578" y="3059668"/>
+            <a:ext cx="1595309" cy="369332"/>
+          </a:xfrm>
+          <a:prstGeom prst="rect">
+            <a:avLst/>
+          </a:prstGeom>
+          <a:noFill/>
+        </p:spPr>
+        <p:txBody>
+          <a:bodyPr wrap="none" rtlCol="0">
+            <a:spAutoFit/>
+          </a:bodyPr>
+          <a:lstStyle/>
+          <a:p>
+            <a:r>
+              <a:rPr kumimoji="1" lang="ja-JP" altLang="en-US" b="1" dirty="0">
+                <a:solidFill>
+                  <a:schemeClr val="bg1"/>
+                </a:solidFill>
+                <a:latin typeface="Meiryo UI" panose="020B0604030504040204" pitchFamily="50" charset="-128"/>
+                <a:ea typeface="Meiryo UI" panose="020B0604030504040204" pitchFamily="50" charset="-128"/>
+              </a:rPr>
+              <a:t>鳥大</a:t>
+            </a:r>
+            <a:r>
+              <a:rPr kumimoji="1" lang="en-US" altLang="ja-JP" b="1" dirty="0">
+                <a:solidFill>
+                  <a:schemeClr val="bg1"/>
+                </a:solidFill>
+                <a:latin typeface="Meiryo UI" panose="020B0604030504040204" pitchFamily="50" charset="-128"/>
+                <a:ea typeface="Meiryo UI" panose="020B0604030504040204" pitchFamily="50" charset="-128"/>
+              </a:rPr>
+              <a:t>ID</a:t>
+            </a:r>
+            <a:r>
+              <a:rPr kumimoji="1" lang="ja-JP" altLang="en-US" b="1" dirty="0">
+                <a:solidFill>
+                  <a:schemeClr val="bg1"/>
+                </a:solidFill>
+                <a:latin typeface="Meiryo UI" panose="020B0604030504040204" pitchFamily="50" charset="-128"/>
+                <a:ea typeface="Meiryo UI" panose="020B0604030504040204" pitchFamily="50" charset="-128"/>
+              </a:rPr>
+              <a:t>を確認</a:t>
+            </a:r>
+          </a:p>
+        </p:txBody>
+      </p:sp>
+    </p:spTree>
+    <p:extLst>
+      <p:ext uri="{BB962C8B-B14F-4D97-AF65-F5344CB8AC3E}">
+        <p14:creationId xmlns:p14="http://schemas.microsoft.com/office/powerpoint/2010/main" val="2989937382"/>
+      </p:ext>
+    </p:extLst>
+  </p:cSld>
+  <p:clrMapOvr>
+    <a:masterClrMapping/>
+  </p:clrMapOvr>
+</p:sld>
+</file>
+
+<file path=ppt/slides/slide11.xml><?xml version="1.0" encoding="utf-8"?>
+<p:sld xmlns:a="http://schemas.openxmlformats.org/drawingml/2006/main" xmlns:r="http://schemas.openxmlformats.org/officeDocument/2006/relationships" xmlns:p="http://schemas.openxmlformats.org/presentationml/2006/main">
+  <p:cSld>
+    <p:spTree>
+      <p:nvGrpSpPr>
+        <p:cNvPr id="1" name="">
+          <a:extLst>
+            <a:ext uri="{FF2B5EF4-FFF2-40B4-BE49-F238E27FC236}">
               <a16:creationId xmlns:a16="http://schemas.microsoft.com/office/drawing/2014/main" id="{2DBD776D-5313-3B29-3989-6EF12DDEC56F}"/>
             </a:ext>
           </a:extLst>
@@ -2634,7 +3429,7 @@
 </p:sld>
 </file>
 
-<file path=ppt/slides/slide11.xml><?xml version="1.0" encoding="utf-8"?>
+<file path=ppt/slides/slide12.xml><?xml version="1.0" encoding="utf-8"?>
 <p:sld xmlns:a="http://schemas.openxmlformats.org/drawingml/2006/main" xmlns:r="http://schemas.openxmlformats.org/officeDocument/2006/relationships" xmlns:p="http://schemas.openxmlformats.org/presentationml/2006/main">
   <p:cSld>
     <p:spTree>
@@ -3039,7 +3834,7 @@
 </p:sld>
 </file>
 
-<file path=ppt/slides/slide12.xml><?xml version="1.0" encoding="utf-8"?>
+<file path=ppt/slides/slide13.xml><?xml version="1.0" encoding="utf-8"?>
 <p:sld xmlns:a="http://schemas.openxmlformats.org/drawingml/2006/main" xmlns:r="http://schemas.openxmlformats.org/officeDocument/2006/relationships" xmlns:p="http://schemas.openxmlformats.org/presentationml/2006/main">
   <p:cSld>
     <p:spTree>
@@ -3581,7 +4376,7 @@
 </p:sld>
 </file>
 
-<file path=ppt/slides/slide13.xml><?xml version="1.0" encoding="utf-8"?>
+<file path=ppt/slides/slide14.xml><?xml version="1.0" encoding="utf-8"?>
 <p:sld xmlns:a="http://schemas.openxmlformats.org/drawingml/2006/main" xmlns:r="http://schemas.openxmlformats.org/officeDocument/2006/relationships" xmlns:p="http://schemas.openxmlformats.org/presentationml/2006/main">
   <p:cSld>
     <p:spTree>
@@ -3808,7 +4603,7 @@
 </p:sld>
 </file>
 
-<file path=ppt/slides/slide14.xml><?xml version="1.0" encoding="utf-8"?>
+<file path=ppt/slides/slide15.xml><?xml version="1.0" encoding="utf-8"?>
 <p:sld xmlns:a="http://schemas.openxmlformats.org/drawingml/2006/main" xmlns:r="http://schemas.openxmlformats.org/officeDocument/2006/relationships" xmlns:p="http://schemas.openxmlformats.org/presentationml/2006/main">
   <p:cSld name="Slide 13">
     <p:spTree>
@@ -9704,7 +10499,7 @@
         <p:cNvPr id="1" name="">
           <a:extLst>
             <a:ext uri="{FF2B5EF4-FFF2-40B4-BE49-F238E27FC236}">
-              <a16:creationId xmlns:a16="http://schemas.microsoft.com/office/drawing/2014/main" id="{3B050573-66FF-F9AB-0765-04A31889055D}"/>
+              <a16:creationId xmlns:a16="http://schemas.microsoft.com/office/drawing/2014/main" id="{FB64B606-EEBC-9667-39B8-FCBE4A8AB4B8}"/>
             </a:ext>
           </a:extLst>
         </p:cNvPr>
@@ -9724,7 +10519,7 @@
           <p:cNvPr id="3" name="Text 0">
             <a:extLst>
               <a:ext uri="{FF2B5EF4-FFF2-40B4-BE49-F238E27FC236}">
-                <a16:creationId xmlns:a16="http://schemas.microsoft.com/office/drawing/2014/main" id="{B4FD52C4-C397-2514-E49E-B1BF8EE8FE07}"/>
+                <a16:creationId xmlns:a16="http://schemas.microsoft.com/office/drawing/2014/main" id="{67671411-B040-670E-DA1E-7A2D0C00528B}"/>
               </a:ext>
             </a:extLst>
           </p:cNvPr>
@@ -9774,7 +10569,7 @@
           <p:cNvPr id="4" name="Text 1">
             <a:extLst>
               <a:ext uri="{FF2B5EF4-FFF2-40B4-BE49-F238E27FC236}">
-                <a16:creationId xmlns:a16="http://schemas.microsoft.com/office/drawing/2014/main" id="{78D25E46-3B8A-00A4-F470-6E273AB428B8}"/>
+                <a16:creationId xmlns:a16="http://schemas.microsoft.com/office/drawing/2014/main" id="{201CAA22-24A0-BFDC-E55B-E61836F3946D}"/>
               </a:ext>
             </a:extLst>
           </p:cNvPr>
@@ -9802,7 +10597,7 @@
               <a:buNone/>
             </a:pPr>
             <a:r>
-              <a:rPr lang="en-US" sz="2600" b="1" dirty="0">
+              <a:rPr lang="ja-JP" altLang="en-US" sz="2600" b="1" dirty="0">
                 <a:solidFill>
                   <a:srgbClr val="FFFFFF"/>
                 </a:solidFill>
@@ -9810,29 +10605,7 @@
                 <a:ea typeface="Meiryo UI" panose="020B0604030504040204" pitchFamily="50" charset="-128"/>
                 <a:cs typeface="Noto Sans CJK JP" pitchFamily="34" charset="-120"/>
               </a:rPr>
-              <a:t>Google Colab </a:t>
-            </a:r>
-            <a:r>
-              <a:rPr lang="ja-JP" altLang="en-US" sz="2600" b="1" dirty="0">
-                <a:solidFill>
-                  <a:srgbClr val="FFFFFF"/>
-                </a:solidFill>
-                <a:latin typeface="Meiryo UI" panose="020B0604030504040204" pitchFamily="50" charset="-128"/>
-                <a:ea typeface="Meiryo UI" panose="020B0604030504040204" pitchFamily="50" charset="-128"/>
-                <a:cs typeface="Noto Sans CJK JP" pitchFamily="34" charset="-120"/>
-              </a:rPr>
-              <a:t>の準備</a:t>
-            </a:r>
-            <a:r>
-              <a:rPr lang="en-US" altLang="ja-JP" sz="2600" b="1">
-                <a:solidFill>
-                  <a:srgbClr val="FFFFFF"/>
-                </a:solidFill>
-                <a:latin typeface="Meiryo UI" panose="020B0604030504040204" pitchFamily="50" charset="-128"/>
-                <a:ea typeface="Meiryo UI" panose="020B0604030504040204" pitchFamily="50" charset="-128"/>
-                <a:cs typeface="Noto Sans CJK JP" pitchFamily="34" charset="-120"/>
-              </a:rPr>
-              <a:t>1</a:t>
+              <a:t>講義で使用するノートブックとスライド</a:t>
             </a:r>
             <a:endParaRPr lang="en-US" sz="2600" dirty="0">
               <a:latin typeface="Meiryo UI" panose="020B0604030504040204" pitchFamily="50" charset="-128"/>
@@ -9846,7 +10619,7 @@
           <p:cNvPr id="5" name="Text 2">
             <a:extLst>
               <a:ext uri="{FF2B5EF4-FFF2-40B4-BE49-F238E27FC236}">
-                <a16:creationId xmlns:a16="http://schemas.microsoft.com/office/drawing/2014/main" id="{D0B0E000-BE82-6869-02E7-1014709E90E7}"/>
+                <a16:creationId xmlns:a16="http://schemas.microsoft.com/office/drawing/2014/main" id="{98510E3B-ABAA-7737-FE4F-DBBC1A4C8801}"/>
               </a:ext>
             </a:extLst>
           </p:cNvPr>
@@ -9855,7 +10628,7 @@
         </p:nvSpPr>
         <p:spPr>
           <a:xfrm>
-            <a:off x="1280160" y="1593667"/>
+            <a:off x="1280160" y="1737360"/>
             <a:ext cx="365760" cy="274320"/>
           </a:xfrm>
           <a:prstGeom prst="rect">
@@ -9896,7 +10669,7 @@
           <p:cNvPr id="6" name="Text 3">
             <a:extLst>
               <a:ext uri="{FF2B5EF4-FFF2-40B4-BE49-F238E27FC236}">
-                <a16:creationId xmlns:a16="http://schemas.microsoft.com/office/drawing/2014/main" id="{4B6A4C37-CC5E-F148-3A7C-050F104C7BA7}"/>
+                <a16:creationId xmlns:a16="http://schemas.microsoft.com/office/drawing/2014/main" id="{FCEB2952-B6EC-F8E8-E613-C096FCFBF625}"/>
               </a:ext>
             </a:extLst>
           </p:cNvPr>
@@ -9905,7 +10678,7 @@
         </p:nvSpPr>
         <p:spPr>
           <a:xfrm>
-            <a:off x="1828800" y="1593667"/>
+            <a:off x="1828800" y="1737360"/>
             <a:ext cx="8686800" cy="384048"/>
           </a:xfrm>
           <a:prstGeom prst="rect">
@@ -9924,7 +10697,7 @@
               <a:buNone/>
             </a:pPr>
             <a:r>
-              <a:rPr lang="ja-JP" altLang="en-US" sz="1900" b="1" dirty="0">
+              <a:rPr lang="en-US" sz="1900" b="1" dirty="0">
                 <a:solidFill>
                   <a:srgbClr val="FFFFFF"/>
                 </a:solidFill>
@@ -9932,39 +10705,21 @@
                 <a:ea typeface="Meiryo UI" panose="020B0604030504040204" pitchFamily="50" charset="-128"/>
                 <a:cs typeface="Noto Sans CJK JP" pitchFamily="34" charset="-120"/>
               </a:rPr>
-              <a:t>鳥大</a:t>
-            </a:r>
-            <a:r>
-              <a:rPr lang="en-US" altLang="ja-JP" sz="1900" b="1" dirty="0">
-                <a:solidFill>
-                  <a:srgbClr val="FFFFFF"/>
-                </a:solidFill>
-                <a:latin typeface="Meiryo UI" panose="020B0604030504040204" pitchFamily="50" charset="-128"/>
-                <a:ea typeface="Meiryo UI" panose="020B0604030504040204" pitchFamily="50" charset="-128"/>
-                <a:cs typeface="Noto Sans CJK JP" pitchFamily="34" charset="-120"/>
-              </a:rPr>
-              <a:t>ID</a:t>
-            </a:r>
-            <a:r>
-              <a:rPr lang="ja-JP" altLang="en-US" sz="1900" b="1" dirty="0">
-                <a:solidFill>
-                  <a:srgbClr val="FFFFFF"/>
-                </a:solidFill>
-                <a:latin typeface="Meiryo UI" panose="020B0604030504040204" pitchFamily="50" charset="-128"/>
-                <a:ea typeface="Meiryo UI" panose="020B0604030504040204" pitchFamily="50" charset="-128"/>
-                <a:cs typeface="Noto Sans CJK JP" pitchFamily="34" charset="-120"/>
-              </a:rPr>
-              <a:t>（学籍番号で）ログイン</a:t>
-            </a:r>
-          </a:p>
-        </p:txBody>
-      </p:sp>
-      <p:sp>
-        <p:nvSpPr>
-          <p:cNvPr id="7" name="Text 4">
+              <a:t>https://github.com/iwata97/bioinfo_2026</a:t>
+            </a:r>
+            <a:endParaRPr lang="en-US" sz="1900" dirty="0">
+              <a:latin typeface="Meiryo UI" panose="020B0604030504040204" pitchFamily="50" charset="-128"/>
+              <a:ea typeface="Meiryo UI" panose="020B0604030504040204" pitchFamily="50" charset="-128"/>
+            </a:endParaRPr>
+          </a:p>
+        </p:txBody>
+      </p:sp>
+      <p:sp>
+        <p:nvSpPr>
+          <p:cNvPr id="16" name="Text 13">
             <a:extLst>
               <a:ext uri="{FF2B5EF4-FFF2-40B4-BE49-F238E27FC236}">
-                <a16:creationId xmlns:a16="http://schemas.microsoft.com/office/drawing/2014/main" id="{F61BC422-AFD4-1DDA-FEAA-2EA0FA408FA7}"/>
+                <a16:creationId xmlns:a16="http://schemas.microsoft.com/office/drawing/2014/main" id="{AA0F74BC-CDAA-29F7-5D36-C8128D446BCF}"/>
               </a:ext>
             </a:extLst>
           </p:cNvPr>
@@ -9973,113 +10728,6 @@
         </p:nvSpPr>
         <p:spPr>
           <a:xfrm>
-            <a:off x="1280160" y="1980326"/>
-            <a:ext cx="365760" cy="274320"/>
-          </a:xfrm>
-          <a:prstGeom prst="rect">
-            <a:avLst/>
-          </a:prstGeom>
-          <a:noFill/>
-          <a:ln/>
-        </p:spPr>
-        <p:txBody>
-          <a:bodyPr wrap="square" lIns="254" tIns="254" rIns="254" bIns="254" rtlCol="0" anchor="t">
-            <a:normAutofit lnSpcReduction="10000"/>
-          </a:bodyPr>
-          <a:lstStyle/>
-          <a:p>
-            <a:pPr marL="0" indent="0" algn="ctr">
-              <a:buNone/>
-            </a:pPr>
-            <a:r>
-              <a:rPr lang="en-US" sz="1800" b="1" dirty="0">
-                <a:solidFill>
-                  <a:srgbClr val="16E0C5"/>
-                </a:solidFill>
-                <a:latin typeface="Meiryo UI" panose="020B0604030504040204" pitchFamily="50" charset="-128"/>
-                <a:ea typeface="Meiryo UI" panose="020B0604030504040204" pitchFamily="50" charset="-128"/>
-                <a:cs typeface="Noto Sans CJK JP" pitchFamily="34" charset="-120"/>
-              </a:rPr>
-              <a:t>✓</a:t>
-            </a:r>
-            <a:endParaRPr lang="en-US" sz="1800" dirty="0">
-              <a:latin typeface="Meiryo UI" panose="020B0604030504040204" pitchFamily="50" charset="-128"/>
-              <a:ea typeface="Meiryo UI" panose="020B0604030504040204" pitchFamily="50" charset="-128"/>
-            </a:endParaRPr>
-          </a:p>
-        </p:txBody>
-      </p:sp>
-      <p:sp>
-        <p:nvSpPr>
-          <p:cNvPr id="8" name="Text 5">
-            <a:extLst>
-              <a:ext uri="{FF2B5EF4-FFF2-40B4-BE49-F238E27FC236}">
-                <a16:creationId xmlns:a16="http://schemas.microsoft.com/office/drawing/2014/main" id="{9B2BC43F-62C9-595B-90F9-A72EE1E8E13D}"/>
-              </a:ext>
-            </a:extLst>
-          </p:cNvPr>
-          <p:cNvSpPr/>
-          <p:nvPr/>
-        </p:nvSpPr>
-        <p:spPr>
-          <a:xfrm>
-            <a:off x="1828800" y="1980326"/>
-            <a:ext cx="8686800" cy="384048"/>
-          </a:xfrm>
-          <a:prstGeom prst="rect">
-            <a:avLst/>
-          </a:prstGeom>
-          <a:noFill/>
-          <a:ln/>
-        </p:spPr>
-        <p:txBody>
-          <a:bodyPr wrap="square" lIns="254" tIns="254" rIns="254" bIns="254" rtlCol="0" anchor="t">
-            <a:normAutofit/>
-          </a:bodyPr>
-          <a:lstStyle/>
-          <a:p>
-            <a:pPr marL="0" indent="0" algn="l">
-              <a:buNone/>
-            </a:pPr>
-            <a:r>
-              <a:rPr lang="en-US" sz="1900" b="1" dirty="0">
-                <a:solidFill>
-                  <a:srgbClr val="FFFFFF"/>
-                </a:solidFill>
-                <a:latin typeface="Meiryo UI" panose="020B0604030504040204" pitchFamily="50" charset="-128"/>
-                <a:ea typeface="Meiryo UI" panose="020B0604030504040204" pitchFamily="50" charset="-128"/>
-                <a:cs typeface="Noto Sans CJK JP" pitchFamily="34" charset="-120"/>
-              </a:rPr>
-              <a:t>Google colab（colaboratory）</a:t>
-            </a:r>
-            <a:r>
-              <a:rPr lang="ja-JP" altLang="en-US" sz="1900" b="1" dirty="0">
-                <a:solidFill>
-                  <a:srgbClr val="FFFFFF"/>
-                </a:solidFill>
-                <a:latin typeface="Meiryo UI" panose="020B0604030504040204" pitchFamily="50" charset="-128"/>
-                <a:ea typeface="Meiryo UI" panose="020B0604030504040204" pitchFamily="50" charset="-128"/>
-                <a:cs typeface="Noto Sans CJK JP" pitchFamily="34" charset="-120"/>
-              </a:rPr>
-              <a:t>を検索</a:t>
-            </a:r>
-          </a:p>
-        </p:txBody>
-      </p:sp>
-      <p:sp>
-        <p:nvSpPr>
-          <p:cNvPr id="16" name="Text 13">
-            <a:extLst>
-              <a:ext uri="{FF2B5EF4-FFF2-40B4-BE49-F238E27FC236}">
-                <a16:creationId xmlns:a16="http://schemas.microsoft.com/office/drawing/2014/main" id="{CEB18A70-47D4-FC83-1728-30368D3EA916}"/>
-              </a:ext>
-            </a:extLst>
-          </p:cNvPr>
-          <p:cNvSpPr/>
-          <p:nvPr/>
-        </p:nvSpPr>
-        <p:spPr>
-          <a:xfrm>
             <a:off x="502920" y="6473952"/>
             <a:ext cx="7315200" cy="182880"/>
           </a:xfrm>
@@ -10113,259 +10761,13 @@
               <a:latin typeface="Meiryo UI" panose="020B0604030504040204" pitchFamily="50" charset="-128"/>
               <a:ea typeface="Meiryo UI" panose="020B0604030504040204" pitchFamily="50" charset="-128"/>
             </a:endParaRPr>
-          </a:p>
-        </p:txBody>
-      </p:sp>
-      <p:pic>
-        <p:nvPicPr>
-          <p:cNvPr id="17" name="図 16">
-            <a:extLst>
-              <a:ext uri="{FF2B5EF4-FFF2-40B4-BE49-F238E27FC236}">
-                <a16:creationId xmlns:a16="http://schemas.microsoft.com/office/drawing/2014/main" id="{47453518-29F0-E950-1CF7-FF70A67E74F3}"/>
-              </a:ext>
-            </a:extLst>
-          </p:cNvPr>
-          <p:cNvPicPr>
-            <a:picLocks noChangeAspect="1"/>
-          </p:cNvPicPr>
-          <p:nvPr/>
-        </p:nvPicPr>
-        <p:blipFill>
-          <a:blip r:embed="rId3"/>
-          <a:stretch>
-            <a:fillRect/>
-          </a:stretch>
-        </p:blipFill>
-        <p:spPr>
-          <a:xfrm>
-            <a:off x="1424255" y="2595886"/>
-            <a:ext cx="7429156" cy="3913469"/>
-          </a:xfrm>
-          <a:prstGeom prst="rect">
-            <a:avLst/>
-          </a:prstGeom>
-        </p:spPr>
-      </p:pic>
-      <p:sp>
-        <p:nvSpPr>
-          <p:cNvPr id="19" name="正方形/長方形 18">
-            <a:extLst>
-              <a:ext uri="{FF2B5EF4-FFF2-40B4-BE49-F238E27FC236}">
-                <a16:creationId xmlns:a16="http://schemas.microsoft.com/office/drawing/2014/main" id="{AF61B29D-FCA9-7E76-2110-5BEBD18D8789}"/>
-              </a:ext>
-            </a:extLst>
-          </p:cNvPr>
-          <p:cNvSpPr/>
-          <p:nvPr/>
-        </p:nvSpPr>
-        <p:spPr>
-          <a:xfrm>
-            <a:off x="8254713" y="3059669"/>
-            <a:ext cx="754656" cy="447188"/>
-          </a:xfrm>
-          <a:prstGeom prst="rect">
-            <a:avLst/>
-          </a:prstGeom>
-          <a:noFill/>
-          <a:ln w="38100">
-            <a:solidFill>
-              <a:srgbClr val="FF0000"/>
-            </a:solidFill>
-          </a:ln>
-          <a:effectLst/>
-        </p:spPr>
-        <p:style>
-          <a:lnRef idx="1">
-            <a:schemeClr val="accent1"/>
-          </a:lnRef>
-          <a:fillRef idx="3">
-            <a:schemeClr val="accent1"/>
-          </a:fillRef>
-          <a:effectRef idx="2">
-            <a:schemeClr val="accent1"/>
-          </a:effectRef>
-          <a:fontRef idx="minor">
-            <a:schemeClr val="lt1"/>
-          </a:fontRef>
-        </p:style>
-        <p:txBody>
-          <a:bodyPr rtlCol="0" anchor="ctr"/>
-          <a:lstStyle/>
-          <a:p>
-            <a:pPr algn="ctr"/>
-            <a:endParaRPr kumimoji="1" lang="ja-JP" altLang="en-US"/>
-          </a:p>
-        </p:txBody>
-      </p:sp>
-      <p:sp>
-        <p:nvSpPr>
-          <p:cNvPr id="21" name="矢印: 右 20">
-            <a:extLst>
-              <a:ext uri="{FF2B5EF4-FFF2-40B4-BE49-F238E27FC236}">
-                <a16:creationId xmlns:a16="http://schemas.microsoft.com/office/drawing/2014/main" id="{7862F98D-7637-A485-5726-8E8BF7EBBB4F}"/>
-              </a:ext>
-            </a:extLst>
-          </p:cNvPr>
-          <p:cNvSpPr/>
-          <p:nvPr/>
-        </p:nvSpPr>
-        <p:spPr>
-          <a:xfrm rot="10800000">
-            <a:off x="9187475" y="3059669"/>
-            <a:ext cx="635249" cy="447188"/>
-          </a:xfrm>
-          <a:prstGeom prst="rightArrow">
-            <a:avLst/>
-          </a:prstGeom>
-          <a:solidFill>
-            <a:srgbClr val="FF0000"/>
-          </a:solidFill>
-          <a:ln>
-            <a:solidFill>
-              <a:srgbClr val="FF0000"/>
-            </a:solidFill>
-          </a:ln>
-          <a:effectLst/>
-        </p:spPr>
-        <p:style>
-          <a:lnRef idx="1">
-            <a:schemeClr val="accent1"/>
-          </a:lnRef>
-          <a:fillRef idx="3">
-            <a:schemeClr val="accent1"/>
-          </a:fillRef>
-          <a:effectRef idx="2">
-            <a:schemeClr val="accent1"/>
-          </a:effectRef>
-          <a:fontRef idx="minor">
-            <a:schemeClr val="lt1"/>
-          </a:fontRef>
-        </p:style>
-        <p:txBody>
-          <a:bodyPr rtlCol="0" anchor="ctr"/>
-          <a:lstStyle/>
-          <a:p>
-            <a:pPr algn="ctr"/>
-            <a:endParaRPr kumimoji="1" lang="ja-JP" altLang="en-US"/>
-          </a:p>
-        </p:txBody>
-      </p:sp>
-      <p:sp>
-        <p:nvSpPr>
-          <p:cNvPr id="23" name="正方形/長方形 22">
-            <a:extLst>
-              <a:ext uri="{FF2B5EF4-FFF2-40B4-BE49-F238E27FC236}">
-                <a16:creationId xmlns:a16="http://schemas.microsoft.com/office/drawing/2014/main" id="{B6E124D3-E20A-F2FD-8C20-8E880F3E36B1}"/>
-              </a:ext>
-            </a:extLst>
-          </p:cNvPr>
-          <p:cNvSpPr/>
-          <p:nvPr/>
-        </p:nvSpPr>
-        <p:spPr>
-          <a:xfrm>
-            <a:off x="3449521" y="5190466"/>
-            <a:ext cx="1070473" cy="511539"/>
-          </a:xfrm>
-          <a:prstGeom prst="rect">
-            <a:avLst/>
-          </a:prstGeom>
-          <a:noFill/>
-          <a:ln w="38100">
-            <a:solidFill>
-              <a:srgbClr val="FF0000"/>
-            </a:solidFill>
-          </a:ln>
-          <a:effectLst/>
-        </p:spPr>
-        <p:style>
-          <a:lnRef idx="1">
-            <a:schemeClr val="accent1"/>
-          </a:lnRef>
-          <a:fillRef idx="3">
-            <a:schemeClr val="accent1"/>
-          </a:fillRef>
-          <a:effectRef idx="2">
-            <a:schemeClr val="accent1"/>
-          </a:effectRef>
-          <a:fontRef idx="minor">
-            <a:schemeClr val="lt1"/>
-          </a:fontRef>
-        </p:style>
-        <p:txBody>
-          <a:bodyPr rtlCol="0" anchor="ctr"/>
-          <a:lstStyle/>
-          <a:p>
-            <a:pPr algn="ctr"/>
-            <a:endParaRPr kumimoji="1" lang="ja-JP" altLang="en-US"/>
-          </a:p>
-        </p:txBody>
-      </p:sp>
-      <p:sp>
-        <p:nvSpPr>
-          <p:cNvPr id="25" name="テキスト ボックス 24">
-            <a:extLst>
-              <a:ext uri="{FF2B5EF4-FFF2-40B4-BE49-F238E27FC236}">
-                <a16:creationId xmlns:a16="http://schemas.microsoft.com/office/drawing/2014/main" id="{84B37DA9-F069-DB3E-422D-7C86D90F4927}"/>
-              </a:ext>
-            </a:extLst>
-          </p:cNvPr>
-          <p:cNvSpPr txBox="1"/>
-          <p:nvPr/>
-        </p:nvSpPr>
-        <p:spPr>
-          <a:xfrm>
-            <a:off x="10033578" y="3059668"/>
-            <a:ext cx="1595309" cy="369332"/>
-          </a:xfrm>
-          <a:prstGeom prst="rect">
-            <a:avLst/>
-          </a:prstGeom>
-          <a:noFill/>
-        </p:spPr>
-        <p:txBody>
-          <a:bodyPr wrap="none" rtlCol="0">
-            <a:spAutoFit/>
-          </a:bodyPr>
-          <a:lstStyle/>
-          <a:p>
-            <a:r>
-              <a:rPr kumimoji="1" lang="ja-JP" altLang="en-US" b="1" dirty="0">
-                <a:solidFill>
-                  <a:schemeClr val="bg1"/>
-                </a:solidFill>
-                <a:latin typeface="Meiryo UI" panose="020B0604030504040204" pitchFamily="50" charset="-128"/>
-                <a:ea typeface="Meiryo UI" panose="020B0604030504040204" pitchFamily="50" charset="-128"/>
-              </a:rPr>
-              <a:t>鳥大</a:t>
-            </a:r>
-            <a:r>
-              <a:rPr kumimoji="1" lang="en-US" altLang="ja-JP" b="1" dirty="0">
-                <a:solidFill>
-                  <a:schemeClr val="bg1"/>
-                </a:solidFill>
-                <a:latin typeface="Meiryo UI" panose="020B0604030504040204" pitchFamily="50" charset="-128"/>
-                <a:ea typeface="Meiryo UI" panose="020B0604030504040204" pitchFamily="50" charset="-128"/>
-              </a:rPr>
-              <a:t>ID</a:t>
-            </a:r>
-            <a:r>
-              <a:rPr kumimoji="1" lang="ja-JP" altLang="en-US" b="1" dirty="0">
-                <a:solidFill>
-                  <a:schemeClr val="bg1"/>
-                </a:solidFill>
-                <a:latin typeface="Meiryo UI" panose="020B0604030504040204" pitchFamily="50" charset="-128"/>
-                <a:ea typeface="Meiryo UI" panose="020B0604030504040204" pitchFamily="50" charset="-128"/>
-              </a:rPr>
-              <a:t>を確認</a:t>
-            </a:r>
           </a:p>
         </p:txBody>
       </p:sp>
     </p:spTree>
     <p:extLst>
       <p:ext uri="{BB962C8B-B14F-4D97-AF65-F5344CB8AC3E}">
-        <p14:creationId xmlns:p14="http://schemas.microsoft.com/office/powerpoint/2010/main" val="2989937382"/>
+        <p14:creationId xmlns:p14="http://schemas.microsoft.com/office/powerpoint/2010/main" val="342009625"/>
       </p:ext>
     </p:extLst>
   </p:cSld>
